--- a/Voysen_Brand_Matching_Presentation.pptx
+++ b/Voysen_Brand_Matching_Presentation.pptx
@@ -4,6 +4,9 @@
   <p:sldMasterIdLst>
     <p:sldMasterId id="2147483648" r:id="rId1"/>
   </p:sldMasterIdLst>
+  <p:notesMasterIdLst>
+    <p:notesMasterId r:id="rId10"/>
+  </p:notesMasterIdLst>
   <p:sldIdLst>
     <p:sldId id="256" r:id="rId2"/>
     <p:sldId id="257" r:id="rId3"/>
@@ -14,9 +17,6 @@
     <p:sldId id="262" r:id="rId8"/>
     <p:sldId id="263" r:id="rId9"/>
   </p:sldIdLst>
-  <p:notesMasterIdLst>
-    <p:notesMasterId r:id="rId10"/>
-  </p:notesMasterIdLst>
   <p:sldSz cx="12192000" cy="6858000"/>
   <p:notesSz cx="6858000" cy="12192000"/>
   <p:defaultTextStyle>
@@ -111,13 +111,20 @@
       </a:defRPr>
     </a:lvl9pPr>
   </p:defaultTextStyle>
+  <p:extLst>
+    <p:ext uri="{EFAFB233-063F-42B5-8137-9DF3F51BA10A}">
+      <p15:sldGuideLst xmlns:p15="http://schemas.microsoft.com/office/powerpoint/2012/main"/>
+    </p:ext>
+  </p:extLst>
 </p:presentation>
 </file>
 
 <file path=ppt/charts/chart1.xml><?xml version="1.0" encoding="utf-8"?>
-<c:chartSpace xmlns:c="http://schemas.openxmlformats.org/drawingml/2006/chart" xmlns:a="http://schemas.openxmlformats.org/drawingml/2006/main" xmlns:r="http://schemas.openxmlformats.org/officeDocument/2006/relationships">
+<c:chartSpace xmlns:c="http://schemas.openxmlformats.org/drawingml/2006/chart" xmlns:a="http://schemas.openxmlformats.org/drawingml/2006/main" xmlns:r="http://schemas.openxmlformats.org/officeDocument/2006/relationships" xmlns:c16r2="http://schemas.microsoft.com/office/drawing/2015/06/chart">
   <c:date1904 val="0"/>
+  <c:lang val="fr-FR"/>
   <c:roundedCorners val="1"/>
+  <c:style val="2"/>
   <c:chart>
     <c:title>
       <c:tx>
@@ -134,7 +141,7 @@
               </a:defRPr>
             </a:pPr>
             <a:r>
-              <a:rPr sz="1300" b="0" i="0" u="none" strike="noStrike">
+              <a:rPr lang="en-US" sz="1300" b="0" i="0" u="none" strike="noStrike">
                 <a:solidFill>
                   <a:srgbClr val="000000"/>
                 </a:solidFill>
@@ -145,7 +152,6 @@
           </a:p>
         </c:rich>
       </c:tx>
-      <c:layout/>
       <c:overlay val="0"/>
     </c:title>
     <c:autoTitleDeleted val="0"/>
@@ -178,18 +184,26 @@
           <c:invertIfNegative val="0"/>
           <c:dLbls>
             <c:numFmt formatCode="#,##0" sourceLinked="0"/>
+            <c:spPr>
+              <a:noFill/>
+              <a:ln>
+                <a:noFill/>
+              </a:ln>
+              <a:effectLst/>
+            </c:spPr>
             <c:txPr>
               <a:bodyPr/>
               <a:lstStyle/>
               <a:p>
                 <a:pPr>
-                  <a:defRPr b="0" i="0" strike="noStrike" sz="1000" u="none">
+                  <a:defRPr sz="1000" b="0" i="0" u="none" strike="noStrike">
                     <a:solidFill>
                       <a:srgbClr val="1B1F2A"/>
                     </a:solidFill>
                     <a:latin typeface="Arial"/>
                   </a:defRPr>
                 </a:pPr>
+                <a:endParaRPr lang="en-US"/>
               </a:p>
             </c:txPr>
             <c:showLegendKey val="0"/>
@@ -199,31 +213,34 @@
             <c:showPercent val="0"/>
             <c:showBubbleSize val="0"/>
             <c:showLeaderLines val="0"/>
+            <c:extLst>
+              <c:ext xmlns:c15="http://schemas.microsoft.com/office/drawing/2012/chart" uri="{CE6537A1-D6FC-4f65-9D91-7224C49458BB}">
+                <c15:showLeaderLines val="0"/>
+              </c:ext>
+            </c:extLst>
           </c:dLbls>
           <c:cat>
-            <c:multiLvlStrRef>
+            <c:strRef>
               <c:f>Sheet1!$A$2:$A$6</c:f>
-              <c:multiLvlStrCache>
+              <c:strCache>
                 <c:ptCount val="5"/>
-                <c:lvl>
-                  <c:pt idx="0">
-                    <c:v>Exact match</c:v>
-                  </c:pt>
-                  <c:pt idx="1">
-                    <c:v>Fuzzy — high conf.</c:v>
-                  </c:pt>
-                  <c:pt idx="2">
-                    <c:v>Fuzzy — review band</c:v>
-                  </c:pt>
-                  <c:pt idx="3">
-                    <c:v>New brand</c:v>
-                  </c:pt>
-                  <c:pt idx="4">
-                    <c:v>Unlabeled</c:v>
-                  </c:pt>
-                </c:lvl>
-              </c:multiLvlStrCache>
-            </c:multiLvlStrRef>
+                <c:pt idx="0">
+                  <c:v>Exact match</c:v>
+                </c:pt>
+                <c:pt idx="1">
+                  <c:v>Fuzzy — high conf.</c:v>
+                </c:pt>
+                <c:pt idx="2">
+                  <c:v>Fuzzy — review band</c:v>
+                </c:pt>
+                <c:pt idx="3">
+                  <c:v>New brand</c:v>
+                </c:pt>
+                <c:pt idx="4">
+                  <c:v>Unlabeled</c:v>
+                </c:pt>
+              </c:strCache>
+            </c:strRef>
           </c:cat>
           <c:val>
             <c:numRef>
@@ -249,36 +266,23 @@
               </c:numCache>
             </c:numRef>
           </c:val>
+          <c:extLst>
+            <c:ext xmlns:c16="http://schemas.microsoft.com/office/drawing/2014/chart" uri="{C3380CC4-5D6E-409C-BE32-E72D297353CC}">
+              <c16:uniqueId val="{00000000-CC09-4265-826B-5DFAF160BE0D}"/>
+            </c:ext>
+          </c:extLst>
         </c:ser>
         <c:dLbls>
-          <c:numFmt formatCode="#,##0" sourceLinked="0"/>
-          <c:txPr>
-            <a:bodyPr/>
-            <a:lstStyle/>
-            <a:p>
-              <a:pPr>
-                <a:defRPr b="0" i="0" strike="noStrike" sz="1000" u="none">
-                  <a:solidFill>
-                    <a:srgbClr val="1B1F2A"/>
-                  </a:solidFill>
-                  <a:latin typeface="Arial"/>
-                </a:defRPr>
-              </a:pPr>
-            </a:p>
-          </c:txPr>
           <c:showLegendKey val="0"/>
           <c:showVal val="1"/>
           <c:showCatName val="0"/>
           <c:showSerName val="0"/>
           <c:showPercent val="0"/>
           <c:showBubbleSize val="0"/>
-          <c:showLeaderLines val="0"/>
         </c:dLbls>
         <c:gapWidth val="150"/>
-        <c:overlap val="0"/>
         <c:axId val="2094734554"/>
         <c:axId val="2094734552"/>
-        <c:axId val="2094734556"/>
       </c:barChart>
       <c:catAx>
         <c:axId val="2094734554"/>
@@ -319,6 +323,7 @@
         <c:crosses val="autoZero"/>
         <c:auto val="1"/>
         <c:lblAlgn val="ctr"/>
+        <c:lblOffset val="100"/>
         <c:noMultiLvlLbl val="1"/>
       </c:catAx>
       <c:valAx>
@@ -381,6 +386,7 @@
     </c:plotArea>
     <c:plotVisOnly val="1"/>
     <c:dispBlanksAs val="span"/>
+    <c:showDLblsOverMax val="1"/>
   </c:chart>
   <c:spPr>
     <a:noFill/>
@@ -417,234 +423,10 @@
           <a:chExt cx="0" cy="0"/>
         </a:xfrm>
       </p:grpSpPr>
-      <p:sp>
-        <p:nvSpPr>
-          <p:cNvPr id="2" name="Header Placeholder 1"/>
-          <p:cNvSpPr>
-            <a:spLocks noGrp="1"/>
-          </p:cNvSpPr>
-          <p:nvPr>
-            <p:ph type="hdr" sz="quarter"/>
-          </p:nvPr>
-        </p:nvSpPr>
-        <p:spPr>
-          <a:xfrm>
-            <a:off x="0" y="0"/>
-            <a:ext cx="2971800" cy="458788"/>
-          </a:xfrm>
-          <a:prstGeom prst="rect">
-            <a:avLst/>
-          </a:prstGeom>
-        </p:spPr>
-        <p:txBody>
-          <a:bodyPr vert="horz" lIns="91440" tIns="45720" rIns="91440" bIns="45720" rtlCol="0"/>
-          <a:lstStyle>
-            <a:lvl1pPr algn="l">
-              <a:defRPr sz="1200"/>
-            </a:lvl1pPr>
-          </a:lstStyle>
-          <a:p>
-            <a:endParaRPr lang="en-US"/>
-          </a:p>
-        </p:txBody>
-      </p:sp>
-      <p:sp>
-        <p:nvSpPr>
-          <p:cNvPr id="3" name="Date Placeholder 2"/>
-          <p:cNvSpPr>
-            <a:spLocks noGrp="1"/>
-          </p:cNvSpPr>
-          <p:nvPr>
-            <p:ph type="dt" idx="1"/>
-          </p:nvPr>
-        </p:nvSpPr>
-        <p:spPr>
-          <a:xfrm>
-            <a:off x="3884613" y="0"/>
-            <a:ext cx="2971800" cy="458788"/>
-          </a:xfrm>
-          <a:prstGeom prst="rect">
-            <a:avLst/>
-          </a:prstGeom>
-        </p:spPr>
-        <p:txBody>
-          <a:bodyPr vert="horz" lIns="91440" tIns="45720" rIns="91440" bIns="45720" rtlCol="0"/>
-          <a:lstStyle>
-            <a:lvl1pPr algn="r">
-              <a:defRPr sz="1200"/>
-            </a:lvl1pPr>
-          </a:lstStyle>
-          <a:p>
-            <a:fld id="{5282F153-3F37-0F45-9E97-73ACFA13230C}" type="datetimeFigureOut">
-              <a:rPr lang="en-US"/>
-              <a:t>7/23/19</a:t>
-            </a:fld>
-            <a:endParaRPr lang="en-US"/>
-          </a:p>
-        </p:txBody>
-      </p:sp>
-      <p:sp>
-        <p:nvSpPr>
-          <p:cNvPr id="4" name="Slide Image Placeholder 3"/>
-          <p:cNvSpPr>
-            <a:spLocks noGrp="1" noRot="1" noChangeAspect="1"/>
-          </p:cNvSpPr>
-          <p:nvPr>
-            <p:ph type="sldImg" idx="2"/>
-          </p:nvPr>
-        </p:nvSpPr>
-        <p:spPr>
-          <a:xfrm>
-            <a:off x="685800" y="1143000"/>
-            <a:ext cx="5486400" cy="3086100"/>
-          </a:xfrm>
-          <a:prstGeom prst="rect">
-            <a:avLst/>
-          </a:prstGeom>
-          <a:noFill/>
-          <a:ln w="12700">
-            <a:solidFill>
-              <a:prstClr val="black"/>
-            </a:solidFill>
-          </a:ln>
-        </p:spPr>
-        <p:txBody>
-          <a:bodyPr vert="horz" lIns="91440" tIns="45720" rIns="91440" bIns="45720" rtlCol="0" anchor="ctr"/>
-          <a:lstStyle/>
-          <a:p>
-            <a:endParaRPr lang="en-US"/>
-          </a:p>
-        </p:txBody>
-      </p:sp>
-      <p:sp>
-        <p:nvSpPr>
-          <p:cNvPr id="5" name="Notes Placeholder 4"/>
-          <p:cNvSpPr>
-            <a:spLocks noGrp="1"/>
-          </p:cNvSpPr>
-          <p:nvPr>
-            <p:ph type="body" sz="quarter" idx="3"/>
-          </p:nvPr>
-        </p:nvSpPr>
-        <p:spPr>
-          <a:xfrm>
-            <a:off x="685800" y="4400550"/>
-            <a:ext cx="5486400" cy="3600450"/>
-          </a:xfrm>
-          <a:prstGeom prst="rect">
-            <a:avLst/>
-          </a:prstGeom>
-        </p:spPr>
-        <p:txBody>
-          <a:bodyPr vert="horz" lIns="91440" tIns="45720" rIns="91440" bIns="45720" rtlCol="0"/>
-          <a:lstStyle/>
-          <a:p>
-            <a:pPr lvl="0"/>
-            <a:r>
-              <a:rPr lang="en-US"/>
-              <a:t>Click to edit Master text styles</a:t>
-            </a:r>
-          </a:p>
-          <a:p>
-            <a:pPr lvl="1"/>
-            <a:r>
-              <a:rPr lang="en-US"/>
-              <a:t>Second level</a:t>
-            </a:r>
-          </a:p>
-          <a:p>
-            <a:pPr lvl="2"/>
-            <a:r>
-              <a:rPr lang="en-US"/>
-              <a:t>Third level</a:t>
-            </a:r>
-          </a:p>
-          <a:p>
-            <a:pPr lvl="3"/>
-            <a:r>
-              <a:rPr lang="en-US"/>
-              <a:t>Fourth level</a:t>
-            </a:r>
-          </a:p>
-          <a:p>
-            <a:pPr lvl="4"/>
-            <a:r>
-              <a:rPr lang="en-US"/>
-              <a:t>Fifth level</a:t>
-            </a:r>
-          </a:p>
-        </p:txBody>
-      </p:sp>
-      <p:sp>
-        <p:nvSpPr>
-          <p:cNvPr id="6" name="Footer Placeholder 5"/>
-          <p:cNvSpPr>
-            <a:spLocks noGrp="1"/>
-          </p:cNvSpPr>
-          <p:nvPr>
-            <p:ph type="ftr" sz="quarter" idx="4"/>
-          </p:nvPr>
-        </p:nvSpPr>
-        <p:spPr>
-          <a:xfrm>
-            <a:off x="0" y="8685213"/>
-            <a:ext cx="2971800" cy="458787"/>
-          </a:xfrm>
-          <a:prstGeom prst="rect">
-            <a:avLst/>
-          </a:prstGeom>
-        </p:spPr>
-        <p:txBody>
-          <a:bodyPr vert="horz" lIns="91440" tIns="45720" rIns="91440" bIns="45720" rtlCol="0" anchor="b"/>
-          <a:lstStyle>
-            <a:lvl1pPr algn="l">
-              <a:defRPr sz="1200"/>
-            </a:lvl1pPr>
-          </a:lstStyle>
-          <a:p>
-            <a:endParaRPr lang="en-US"/>
-          </a:p>
-        </p:txBody>
-      </p:sp>
-      <p:sp>
-        <p:nvSpPr>
-          <p:cNvPr id="7" name="Slide Number Placeholder 6"/>
-          <p:cNvSpPr>
-            <a:spLocks noGrp="1"/>
-          </p:cNvSpPr>
-          <p:nvPr>
-            <p:ph type="sldNum" sz="quarter" idx="5"/>
-          </p:nvPr>
-        </p:nvSpPr>
-        <p:spPr>
-          <a:xfrm>
-            <a:off x="3884613" y="8685213"/>
-            <a:ext cx="2971800" cy="458787"/>
-          </a:xfrm>
-          <a:prstGeom prst="rect">
-            <a:avLst/>
-          </a:prstGeom>
-        </p:spPr>
-        <p:txBody>
-          <a:bodyPr vert="horz" lIns="91440" tIns="45720" rIns="91440" bIns="45720" rtlCol="0" anchor="b"/>
-          <a:lstStyle>
-            <a:lvl1pPr algn="r">
-              <a:defRPr sz="1200"/>
-            </a:lvl1pPr>
-          </a:lstStyle>
-          <a:p>
-            <a:fld id="{CE5E9CC1-C706-0F49-92D6-E571CC5EEA8F}" type="slidenum">
-              <a:rPr lang="en-US"/>
-              <a:t>‹#›</a:t>
-            </a:fld>
-            <a:endParaRPr lang="en-US"/>
-          </a:p>
-        </p:txBody>
-      </p:sp>
     </p:spTree>
     <p:extLst>
       <p:ext uri="{BB962C8B-B14F-4D97-AF65-F5344CB8AC3E}">
-        <p14:creationId xmlns:p14="http://schemas.microsoft.com/office/powerpoint/2010/main" val="1024086991"/>
+        <p14:creationId xmlns:p14="http://schemas.microsoft.com/office/powerpoint/2010/main" val="2495755269"/>
       </p:ext>
     </p:extLst>
   </p:cSld>
@@ -788,10 +570,6 @@
           <a:bodyPr/>
           <a:lstStyle/>
           <a:p>
-            <a:r>
-              <a:rPr lang="en-US" dirty="0"/>
-              <a:t/>
-            </a:r>
             <a:endParaRPr lang="en-US" dirty="0"/>
           </a:p>
         </p:txBody>
@@ -876,10 +654,6 @@
           <a:bodyPr/>
           <a:lstStyle/>
           <a:p>
-            <a:r>
-              <a:rPr lang="en-US" dirty="0"/>
-              <a:t/>
-            </a:r>
             <a:endParaRPr lang="en-US" dirty="0"/>
           </a:p>
         </p:txBody>
@@ -964,10 +738,6 @@
           <a:bodyPr/>
           <a:lstStyle/>
           <a:p>
-            <a:r>
-              <a:rPr lang="en-US" dirty="0"/>
-              <a:t/>
-            </a:r>
             <a:endParaRPr lang="en-US" dirty="0"/>
           </a:p>
         </p:txBody>
@@ -1052,10 +822,6 @@
           <a:bodyPr/>
           <a:lstStyle/>
           <a:p>
-            <a:r>
-              <a:rPr lang="en-US" dirty="0"/>
-              <a:t/>
-            </a:r>
             <a:endParaRPr lang="en-US" dirty="0"/>
           </a:p>
         </p:txBody>
@@ -1140,10 +906,6 @@
           <a:bodyPr/>
           <a:lstStyle/>
           <a:p>
-            <a:r>
-              <a:rPr lang="en-US" dirty="0"/>
-              <a:t/>
-            </a:r>
             <a:endParaRPr lang="en-US" dirty="0"/>
           </a:p>
         </p:txBody>
@@ -1228,10 +990,6 @@
           <a:bodyPr/>
           <a:lstStyle/>
           <a:p>
-            <a:r>
-              <a:rPr lang="en-US" dirty="0"/>
-              <a:t/>
-            </a:r>
             <a:endParaRPr lang="en-US" dirty="0"/>
           </a:p>
         </p:txBody>
@@ -1316,10 +1074,6 @@
           <a:bodyPr/>
           <a:lstStyle/>
           <a:p>
-            <a:r>
-              <a:rPr lang="en-US" dirty="0"/>
-              <a:t/>
-            </a:r>
             <a:endParaRPr lang="en-US" dirty="0"/>
           </a:p>
         </p:txBody>
@@ -1404,10 +1158,6 @@
           <a:bodyPr/>
           <a:lstStyle/>
           <a:p>
-            <a:r>
-              <a:rPr lang="en-US" dirty="0"/>
-              <a:t/>
-            </a:r>
             <a:endParaRPr lang="en-US" dirty="0"/>
           </a:p>
         </p:txBody>
@@ -1481,6 +1231,11 @@
 <file path=ppt/slideMasters/slideMaster1.xml><?xml version="1.0" encoding="utf-8"?>
 <p:sldMaster xmlns:a="http://schemas.openxmlformats.org/drawingml/2006/main" xmlns:r="http://schemas.openxmlformats.org/officeDocument/2006/relationships" xmlns:p="http://schemas.openxmlformats.org/presentationml/2006/main">
   <p:cSld>
+    <p:bg>
+      <p:bgRef idx="1001">
+        <a:schemeClr val="bg1"/>
+      </p:bgRef>
+    </p:bg>
     <p:spTree>
       <p:nvGrpSpPr>
         <p:cNvPr id="1" name=""/>
@@ -1763,6 +1518,7 @@
         <a:solidFill>
           <a:srgbClr val="13203A"/>
         </a:solidFill>
+        <a:effectLst/>
       </p:bgPr>
     </p:bg>
     <p:spTree>
@@ -1800,7 +1556,7 @@
           <a:bodyPr wrap="square" rtlCol="0" anchor="ctr"/>
           <a:lstStyle/>
           <a:p>
-            <a:pPr indent="0" marL="0">
+            <a:pPr marL="0" indent="0">
               <a:buNone/>
             </a:pPr>
             <a:r>
@@ -1839,7 +1595,7 @@
           <a:bodyPr wrap="square" rtlCol="0" anchor="ctr"/>
           <a:lstStyle/>
           <a:p>
-            <a:pPr indent="0" marL="0">
+            <a:pPr marL="0" indent="0">
               <a:buNone/>
             </a:pPr>
             <a:r>
@@ -1901,7 +1657,7 @@
           <a:bodyPr wrap="square" rtlCol="0" anchor="ctr"/>
           <a:lstStyle/>
           <a:p>
-            <a:pPr indent="0" marL="0">
+            <a:pPr marL="0" indent="0">
               <a:buNone/>
             </a:pPr>
             <a:r>
@@ -1910,7 +1666,7 @@
                   <a:srgbClr val="9AA5B8"/>
                 </a:solidFill>
               </a:rPr>
-              <a:t>Technical case — Lead Data Engineer / Data Scientist</a:t>
+              <a:t>Technical case: Lead Data Engineer / Data Scientist</a:t>
             </a:r>
             <a:endParaRPr lang="en-US" sz="1300" dirty="0"/>
           </a:p>
@@ -1937,7 +1693,7 @@
           <a:bodyPr wrap="square" rtlCol="0" anchor="ctr"/>
           <a:lstStyle/>
           <a:p>
-            <a:pPr algn="r" indent="0" marL="0">
+            <a:pPr marL="0" indent="0" algn="r">
               <a:buNone/>
             </a:pPr>
             <a:r>
@@ -1952,6 +1708,108 @@
           </a:p>
         </p:txBody>
       </p:sp>
+      <p:sp>
+        <p:nvSpPr>
+          <p:cNvPr id="7" name="Text 3">
+            <a:extLst>
+              <a:ext uri="{FF2B5EF4-FFF2-40B4-BE49-F238E27FC236}">
+                <a16:creationId xmlns:a16="http://schemas.microsoft.com/office/drawing/2014/main" id="{26CDD08C-474F-8C9E-1453-C95287BD29B3}"/>
+              </a:ext>
+            </a:extLst>
+          </p:cNvPr>
+          <p:cNvSpPr txBox="1"/>
+          <p:nvPr/>
+        </p:nvSpPr>
+        <p:spPr>
+          <a:xfrm>
+            <a:off x="1608268" y="594360"/>
+            <a:ext cx="7315200" cy="365760"/>
+          </a:xfrm>
+          <a:prstGeom prst="rect">
+            <a:avLst/>
+          </a:prstGeom>
+          <a:noFill/>
+          <a:ln/>
+        </p:spPr>
+        <p:txBody>
+          <a:bodyPr wrap="square" rtlCol="0" anchor="ctr"/>
+          <a:lstStyle/>
+          <a:p>
+            <a:pPr marL="0" indent="0">
+              <a:buNone/>
+            </a:pPr>
+            <a:r>
+              <a:rPr lang="en-US" sz="2000" b="1" dirty="0">
+                <a:solidFill>
+                  <a:srgbClr val="9AA5B8"/>
+                </a:solidFill>
+              </a:rPr>
+              <a:t>Ayoub ETOULLALI</a:t>
+            </a:r>
+            <a:endParaRPr lang="en-US" sz="2000" b="1" dirty="0"/>
+          </a:p>
+        </p:txBody>
+      </p:sp>
+      <p:pic>
+        <p:nvPicPr>
+          <p:cNvPr id="9" name="Image 8">
+            <a:extLst>
+              <a:ext uri="{FF2B5EF4-FFF2-40B4-BE49-F238E27FC236}">
+                <a16:creationId xmlns:a16="http://schemas.microsoft.com/office/drawing/2014/main" id="{2352DFD6-D40D-E316-DD4A-BD593B98690D}"/>
+              </a:ext>
+            </a:extLst>
+          </p:cNvPr>
+          <p:cNvPicPr>
+            <a:picLocks noChangeAspect="1"/>
+          </p:cNvPicPr>
+          <p:nvPr/>
+        </p:nvPicPr>
+        <p:blipFill>
+          <a:blip r:embed="rId3"/>
+          <a:stretch>
+            <a:fillRect/>
+          </a:stretch>
+        </p:blipFill>
+        <p:spPr>
+          <a:xfrm>
+            <a:off x="568361" y="248100"/>
+            <a:ext cx="801967" cy="962360"/>
+          </a:xfrm>
+          <a:prstGeom prst="rect">
+            <a:avLst/>
+          </a:prstGeom>
+        </p:spPr>
+      </p:pic>
+      <p:pic>
+        <p:nvPicPr>
+          <p:cNvPr id="10" name="Image 9" descr="Home⎜Voysen">
+            <a:extLst>
+              <a:ext uri="{FF2B5EF4-FFF2-40B4-BE49-F238E27FC236}">
+                <a16:creationId xmlns:a16="http://schemas.microsoft.com/office/drawing/2014/main" id="{55923112-AA7F-445D-F5F8-E099CD34B3BE}"/>
+              </a:ext>
+            </a:extLst>
+          </p:cNvPr>
+          <p:cNvPicPr>
+            <a:picLocks noChangeAspect="1"/>
+          </p:cNvPicPr>
+          <p:nvPr/>
+        </p:nvPicPr>
+        <p:blipFill>
+          <a:blip r:embed="rId4"/>
+          <a:stretch>
+            <a:fillRect/>
+          </a:stretch>
+        </p:blipFill>
+        <p:spPr>
+          <a:xfrm>
+            <a:off x="8404154" y="291465"/>
+            <a:ext cx="3219485" cy="717003"/>
+          </a:xfrm>
+          <a:prstGeom prst="rect">
+            <a:avLst/>
+          </a:prstGeom>
+        </p:spPr>
+      </p:pic>
     </p:spTree>
   </p:cSld>
   <p:clrMapOvr>
@@ -1968,6 +1826,7 @@
         <a:solidFill>
           <a:srgbClr val="F4EFE6"/>
         </a:solidFill>
+        <a:effectLst/>
       </p:bgPr>
     </p:bg>
     <p:spTree>
@@ -2005,11 +1864,11 @@
           <a:bodyPr wrap="square" rtlCol="0" anchor="ctr"/>
           <a:lstStyle/>
           <a:p>
-            <a:pPr indent="0" marL="0">
-              <a:buNone/>
-            </a:pPr>
-            <a:r>
-              <a:rPr lang="en-US" sz="1300" b="1" spc="200" kern="0" dirty="0">
+            <a:pPr marL="0" indent="0">
+              <a:buNone/>
+            </a:pPr>
+            <a:r>
+              <a:rPr lang="en-US" sz="1300" b="1" kern="0" spc="200" dirty="0">
                 <a:solidFill>
                   <a:srgbClr val="C9A24B"/>
                 </a:solidFill>
@@ -2041,7 +1900,7 @@
           <a:bodyPr wrap="square" rtlCol="0" anchor="ctr"/>
           <a:lstStyle/>
           <a:p>
-            <a:pPr indent="0" marL="0">
+            <a:pPr marL="0" indent="0">
               <a:buNone/>
             </a:pPr>
             <a:r>
@@ -2103,7 +1962,7 @@
           <a:bodyPr wrap="square" rtlCol="0" anchor="t"/>
           <a:lstStyle/>
           <a:p>
-            <a:pPr indent="0" marL="0">
+            <a:pPr marL="0" indent="0">
               <a:buNone/>
             </a:pPr>
             <a:r>
@@ -2118,7 +1977,7 @@
             <a:endParaRPr lang="en-US" sz="1500" dirty="0"/>
           </a:p>
           <a:p>
-            <a:pPr indent="0" marL="0">
+            <a:pPr marL="0" indent="0">
               <a:buNone/>
             </a:pPr>
             <a:r>
@@ -2133,7 +1992,7 @@
             <a:endParaRPr lang="en-US" sz="1500" dirty="0"/>
           </a:p>
           <a:p>
-            <a:pPr indent="0" marL="0">
+            <a:pPr marL="0" indent="0">
               <a:buNone/>
             </a:pPr>
             <a:r>
@@ -2148,7 +2007,7 @@
             <a:endParaRPr lang="en-US" sz="1500" dirty="0"/>
           </a:p>
           <a:p>
-            <a:pPr indent="0" marL="0">
+            <a:pPr marL="0" indent="0">
               <a:buNone/>
             </a:pPr>
             <a:r>
@@ -2164,7 +2023,7 @@
             <a:endParaRPr lang="en-US" sz="1500" dirty="0"/>
           </a:p>
           <a:p>
-            <a:pPr indent="0" marL="0">
+            <a:pPr marL="0" indent="0">
               <a:buNone/>
             </a:pPr>
             <a:r>
@@ -2173,13 +2032,13 @@
                   <a:srgbClr val="1B1F2A"/>
                 </a:solidFill>
               </a:rPr>
-              <a:t>Association schema: (id_brand_voysen, brand_voysen, url_source, source) — one row per retailer entry.
+              <a:t>Association schema: (id_brand_voysen, brand_voysen, url_source, source), one row per retailer entry.
 </a:t>
             </a:r>
             <a:endParaRPr lang="en-US" sz="1500" dirty="0"/>
           </a:p>
           <a:p>
-            <a:pPr indent="0" marL="0">
+            <a:pPr marL="0" indent="0">
               <a:buNone/>
             </a:pPr>
             <a:r>
@@ -2242,7 +2101,7 @@
           <a:bodyPr wrap="square" rtlCol="0" anchor="ctr"/>
           <a:lstStyle/>
           <a:p>
-            <a:pPr indent="0" marL="0">
+            <a:pPr marL="0" indent="0">
               <a:buNone/>
             </a:pPr>
             <a:r>
@@ -2278,7 +2137,7 @@
           <a:bodyPr wrap="square" rtlCol="0" anchor="t"/>
           <a:lstStyle/>
           <a:p>
-            <a:pPr indent="0" marL="0">
+            <a:pPr marL="0" indent="0">
               <a:spcAft>
                 <a:spcPts val="1000"/>
               </a:spcAft>
@@ -2296,7 +2155,7 @@
             <a:endParaRPr lang="en-US" sz="1250" dirty="0"/>
           </a:p>
           <a:p>
-            <a:pPr indent="0" marL="0">
+            <a:pPr marL="0" indent="0">
               <a:spcAft>
                 <a:spcPts val="1000"/>
               </a:spcAft>
@@ -2314,7 +2173,7 @@
             <a:endParaRPr lang="en-US" sz="1250" dirty="0"/>
           </a:p>
           <a:p>
-            <a:pPr indent="0" marL="0">
+            <a:pPr marL="0" indent="0">
               <a:spcAft>
                 <a:spcPts val="1000"/>
               </a:spcAft>
@@ -2332,7 +2191,7 @@
             <a:endParaRPr lang="en-US" sz="1250" dirty="0"/>
           </a:p>
           <a:p>
-            <a:pPr indent="0" marL="0">
+            <a:pPr marL="0" indent="0">
               <a:spcAft>
                 <a:spcPts val="1000"/>
               </a:spcAft>
@@ -2366,6 +2225,7 @@
         <a:solidFill>
           <a:srgbClr val="F4EFE6"/>
         </a:solidFill>
+        <a:effectLst/>
       </p:bgPr>
     </p:bg>
     <p:spTree>
@@ -2403,11 +2263,11 @@
           <a:bodyPr wrap="square" rtlCol="0" anchor="ctr"/>
           <a:lstStyle/>
           <a:p>
-            <a:pPr indent="0" marL="0">
-              <a:buNone/>
-            </a:pPr>
-            <a:r>
-              <a:rPr lang="en-US" sz="1300" b="1" spc="200" kern="0" dirty="0">
+            <a:pPr marL="0" indent="0">
+              <a:buNone/>
+            </a:pPr>
+            <a:r>
+              <a:rPr lang="en-US" sz="1300" b="1" kern="0" spc="200" dirty="0">
                 <a:solidFill>
                   <a:srgbClr val="C9A24B"/>
                 </a:solidFill>
@@ -2439,7 +2299,7 @@
           <a:bodyPr wrap="square" rtlCol="0" anchor="ctr"/>
           <a:lstStyle/>
           <a:p>
-            <a:pPr indent="0" marL="0">
+            <a:pPr marL="0" indent="0">
               <a:buNone/>
             </a:pPr>
             <a:r>
@@ -2528,7 +2388,7 @@
           <a:bodyPr wrap="square" rtlCol="0" anchor="ctr"/>
           <a:lstStyle/>
           <a:p>
-            <a:pPr indent="0" marL="0">
+            <a:pPr marL="0" indent="0">
               <a:buNone/>
             </a:pPr>
             <a:r>
@@ -2567,7 +2427,7 @@
           <a:bodyPr wrap="square" rtlCol="0" anchor="ctr"/>
           <a:lstStyle/>
           <a:p>
-            <a:pPr indent="0" marL="0">
+            <a:pPr marL="0" indent="0">
               <a:buNone/>
             </a:pPr>
             <a:r>
@@ -2603,7 +2463,7 @@
           <a:bodyPr wrap="square" rtlCol="0" anchor="ctr"/>
           <a:lstStyle/>
           <a:p>
-            <a:pPr indent="0" marL="0">
+            <a:pPr marL="0" indent="0">
               <a:buNone/>
             </a:pPr>
             <a:r>
@@ -2666,7 +2526,7 @@
           <a:bodyPr wrap="square" rtlCol="0" anchor="ctr"/>
           <a:lstStyle/>
           <a:p>
-            <a:pPr indent="0" marL="0">
+            <a:pPr marL="0" indent="0">
               <a:buNone/>
             </a:pPr>
             <a:r>
@@ -2705,7 +2565,7 @@
           <a:bodyPr wrap="square" rtlCol="0" anchor="ctr"/>
           <a:lstStyle/>
           <a:p>
-            <a:pPr indent="0" marL="0">
+            <a:pPr marL="0" indent="0">
               <a:buNone/>
             </a:pPr>
             <a:r>
@@ -2741,7 +2601,7 @@
           <a:bodyPr wrap="square" rtlCol="0" anchor="ctr"/>
           <a:lstStyle/>
           <a:p>
-            <a:pPr indent="0" marL="0">
+            <a:pPr marL="0" indent="0">
               <a:buNone/>
             </a:pPr>
             <a:r>
@@ -2804,7 +2664,7 @@
           <a:bodyPr wrap="square" rtlCol="0" anchor="ctr"/>
           <a:lstStyle/>
           <a:p>
-            <a:pPr indent="0" marL="0">
+            <a:pPr marL="0" indent="0">
               <a:buNone/>
             </a:pPr>
             <a:r>
@@ -2843,7 +2703,7 @@
           <a:bodyPr wrap="square" rtlCol="0" anchor="ctr"/>
           <a:lstStyle/>
           <a:p>
-            <a:pPr indent="0" marL="0">
+            <a:pPr marL="0" indent="0">
               <a:buNone/>
             </a:pPr>
             <a:r>
@@ -2879,7 +2739,7 @@
           <a:bodyPr wrap="square" rtlCol="0" anchor="ctr"/>
           <a:lstStyle/>
           <a:p>
-            <a:pPr indent="0" marL="0">
+            <a:pPr marL="0" indent="0">
               <a:buNone/>
             </a:pPr>
             <a:r>
@@ -2915,7 +2775,7 @@
           <a:bodyPr wrap="square" rtlCol="0" anchor="t"/>
           <a:lstStyle/>
           <a:p>
-            <a:pPr indent="0" marL="0">
+            <a:pPr marL="0" indent="0">
               <a:spcAft>
                 <a:spcPts val="600"/>
               </a:spcAft>
@@ -2933,7 +2793,7 @@
             <a:endParaRPr lang="en-US" sz="1400" dirty="0"/>
           </a:p>
           <a:p>
-            <a:pPr indent="0" marL="0">
+            <a:pPr marL="0" indent="0">
               <a:spcAft>
                 <a:spcPts val="600"/>
               </a:spcAft>
@@ -2945,13 +2805,13 @@
                   <a:srgbClr val="000000"/>
                 </a:solidFill>
               </a:rPr>
-              <a:t>• A ready-made cleaned column, brand_source_used_for_matching, already exists — used as the primary matching key.
+              <a:t>• A ready-made cleaned column, brand_source_used_for_matching, already exists, used as the primary matching key.
 </a:t>
             </a:r>
             <a:endParaRPr lang="en-US" sz="1400" dirty="0"/>
           </a:p>
           <a:p>
-            <a:pPr indent="0" marL="0">
+            <a:pPr marL="0" indent="0">
               <a:spcAft>
                 <a:spcPts val="600"/>
               </a:spcAft>
@@ -2969,7 +2829,7 @@
             <a:endParaRPr lang="en-US" sz="1400" dirty="0"/>
           </a:p>
           <a:p>
-            <a:pPr indent="0" marL="0">
+            <a:pPr marL="0" indent="0">
               <a:spcAft>
                 <a:spcPts val="600"/>
               </a:spcAft>
@@ -2981,7 +2841,7 @@
                   <a:srgbClr val="000000"/>
                 </a:solidFill>
               </a:rPr>
-              <a:t>• Voysen's brand universe (skincare/beauty) and the retailer catalogs (general marketplace) overlap only partially by design — a large share of retailer 'brands' will legitimately be new.</a:t>
+              <a:t>• Voysen's brand universe (skincare/beauty) and the retailer catalogs (general marketplace) overlap only partially by design, a large share of retailer 'brands' will legitimately be new.</a:t>
             </a:r>
             <a:endParaRPr lang="en-US" sz="1400" dirty="0"/>
           </a:p>
@@ -3003,6 +2863,7 @@
         <a:solidFill>
           <a:srgbClr val="F4EFE6"/>
         </a:solidFill>
+        <a:effectLst/>
       </p:bgPr>
     </p:bg>
     <p:spTree>
@@ -3040,11 +2901,11 @@
           <a:bodyPr wrap="square" rtlCol="0" anchor="ctr"/>
           <a:lstStyle/>
           <a:p>
-            <a:pPr indent="0" marL="0">
-              <a:buNone/>
-            </a:pPr>
-            <a:r>
-              <a:rPr lang="en-US" sz="1300" b="1" spc="200" kern="0" dirty="0">
+            <a:pPr marL="0" indent="0">
+              <a:buNone/>
+            </a:pPr>
+            <a:r>
+              <a:rPr lang="en-US" sz="1300" b="1" kern="0" spc="200" dirty="0">
                 <a:solidFill>
                   <a:srgbClr val="C9A24B"/>
                 </a:solidFill>
@@ -3076,7 +2937,7 @@
           <a:bodyPr wrap="square" rtlCol="0" anchor="ctr"/>
           <a:lstStyle/>
           <a:p>
-            <a:pPr indent="0" marL="0">
+            <a:pPr marL="0" indent="0">
               <a:buNone/>
             </a:pPr>
             <a:r>
@@ -3190,7 +3051,7 @@
           <a:bodyPr wrap="square" rtlCol="0" anchor="ctr"/>
           <a:lstStyle/>
           <a:p>
-            <a:pPr algn="ctr" indent="0" marL="0">
+            <a:pPr marL="0" indent="0" algn="ctr">
               <a:buNone/>
             </a:pPr>
             <a:r>
@@ -3226,7 +3087,7 @@
           <a:bodyPr wrap="square" rtlCol="0" anchor="t"/>
           <a:lstStyle/>
           <a:p>
-            <a:pPr indent="0" marL="0">
+            <a:pPr marL="0" indent="0">
               <a:buNone/>
             </a:pPr>
             <a:r>
@@ -3262,7 +3123,7 @@
           <a:bodyPr wrap="square" rtlCol="0" anchor="t"/>
           <a:lstStyle/>
           <a:p>
-            <a:pPr indent="0" marL="0">
+            <a:pPr marL="0" indent="0">
               <a:buNone/>
             </a:pPr>
             <a:r>
@@ -3298,7 +3159,7 @@
           <a:bodyPr wrap="square" rtlCol="0" anchor="t"/>
           <a:lstStyle/>
           <a:p>
-            <a:pPr indent="0" marL="0">
+            <a:pPr marL="0" indent="0">
               <a:buNone/>
             </a:pPr>
             <a:r>
@@ -3307,7 +3168,7 @@
                   <a:srgbClr val="3E7C59"/>
                 </a:solidFill>
               </a:rPr>
-              <a:t>~0.6% of rows — cheap, unambiguous, zero false positives</a:t>
+              <a:t>~0.6% of rows, cheap, unambiguous, zero false positives</a:t>
             </a:r>
             <a:endParaRPr lang="en-US" sz="1000" dirty="0"/>
           </a:p>
@@ -3386,7 +3247,7 @@
           <a:bodyPr wrap="square" rtlCol="0" anchor="ctr"/>
           <a:lstStyle/>
           <a:p>
-            <a:pPr algn="ctr" indent="0" marL="0">
+            <a:pPr marL="0" indent="0" algn="ctr">
               <a:buNone/>
             </a:pPr>
             <a:r>
@@ -3422,7 +3283,7 @@
           <a:bodyPr wrap="square" rtlCol="0" anchor="t"/>
           <a:lstStyle/>
           <a:p>
-            <a:pPr indent="0" marL="0">
+            <a:pPr marL="0" indent="0">
               <a:buNone/>
             </a:pPr>
             <a:r>
@@ -3458,7 +3319,7 @@
           <a:bodyPr wrap="square" rtlCol="0" anchor="t"/>
           <a:lstStyle/>
           <a:p>
-            <a:pPr indent="0" marL="0">
+            <a:pPr marL="0" indent="0">
               <a:buNone/>
             </a:pPr>
             <a:r>
@@ -3467,7 +3328,7 @@
                   <a:srgbClr val="D8DCE8"/>
                 </a:solidFill>
               </a:rPr>
-              <a:t>Character 2-4 gram TF-IDF vectors + batched sparse cosine similarity — a compiled fuzzy-match library wasn't available offline, so this stays vectorized and scales to 280k x 12k.</a:t>
+              <a:t>Character 2-4 gram TF-IDF vectors + batched sparse cosine similarity, a compiled fuzzy-match library wasn't available offline, so this stays vectorized and scales to 280k x 12k.</a:t>
             </a:r>
             <a:endParaRPr lang="en-US" sz="1100" dirty="0"/>
           </a:p>
@@ -3494,7 +3355,7 @@
           <a:bodyPr wrap="square" rtlCol="0" anchor="t"/>
           <a:lstStyle/>
           <a:p>
-            <a:pPr indent="0" marL="0">
+            <a:pPr marL="0" indent="0">
               <a:buNone/>
             </a:pPr>
             <a:r>
@@ -3582,7 +3443,7 @@
           <a:bodyPr wrap="square" rtlCol="0" anchor="ctr"/>
           <a:lstStyle/>
           <a:p>
-            <a:pPr algn="ctr" indent="0" marL="0">
+            <a:pPr marL="0" indent="0" algn="ctr">
               <a:buNone/>
             </a:pPr>
             <a:r>
@@ -3618,7 +3479,7 @@
           <a:bodyPr wrap="square" rtlCol="0" anchor="t"/>
           <a:lstStyle/>
           <a:p>
-            <a:pPr indent="0" marL="0">
+            <a:pPr marL="0" indent="0">
               <a:buNone/>
             </a:pPr>
             <a:r>
@@ -3654,7 +3515,7 @@
           <a:bodyPr wrap="square" rtlCol="0" anchor="t"/>
           <a:lstStyle/>
           <a:p>
-            <a:pPr indent="0" marL="0">
+            <a:pPr marL="0" indent="0">
               <a:buNone/>
             </a:pPr>
             <a:r>
@@ -3690,7 +3551,7 @@
           <a:bodyPr wrap="square" rtlCol="0" anchor="t"/>
           <a:lstStyle/>
           <a:p>
-            <a:pPr indent="0" marL="0">
+            <a:pPr marL="0" indent="0">
               <a:buNone/>
             </a:pPr>
             <a:r>
@@ -3699,7 +3560,7 @@
                   <a:srgbClr val="3E7C59"/>
                 </a:solidFill>
               </a:rPr>
-              <a:t>Every row still gets an association — nothing is dropped</a:t>
+              <a:t>Every row still gets an association, nothing is dropped</a:t>
             </a:r>
             <a:endParaRPr lang="en-US" sz="1000" dirty="0"/>
           </a:p>
@@ -3721,6 +3582,7 @@
         <a:solidFill>
           <a:srgbClr val="F4EFE6"/>
         </a:solidFill>
+        <a:effectLst/>
       </p:bgPr>
     </p:bg>
     <p:spTree>
@@ -3758,11 +3620,11 @@
           <a:bodyPr wrap="square" rtlCol="0" anchor="ctr"/>
           <a:lstStyle/>
           <a:p>
-            <a:pPr indent="0" marL="0">
-              <a:buNone/>
-            </a:pPr>
-            <a:r>
-              <a:rPr lang="en-US" sz="1300" b="1" spc="200" kern="0" dirty="0">
+            <a:pPr marL="0" indent="0">
+              <a:buNone/>
+            </a:pPr>
+            <a:r>
+              <a:rPr lang="en-US" sz="1300" b="1" kern="0" spc="200" dirty="0">
                 <a:solidFill>
                   <a:srgbClr val="C9A24B"/>
                 </a:solidFill>
@@ -3794,7 +3656,7 @@
           <a:bodyPr wrap="square" rtlCol="0" anchor="ctr"/>
           <a:lstStyle/>
           <a:p>
-            <a:pPr indent="0" marL="0">
+            <a:pPr marL="0" indent="0">
               <a:buNone/>
             </a:pPr>
             <a:r>
@@ -3837,7 +3699,7 @@
       </p:sp>
       <p:graphicFrame>
         <p:nvGraphicFramePr>
-          <p:cNvPr id="5" name="Chart 0" descr=""/>
+          <p:cNvPr id="5" name="Chart 0"/>
           <p:cNvGraphicFramePr/>
           <p:nvPr/>
         </p:nvGraphicFramePr>
@@ -3845,9 +3707,9 @@
           <a:off x="640080" y="1828800"/>
           <a:ext cx="6400800" cy="4389120"/>
         </p:xfrm>
-        <a:graphic xmlns:a="http://schemas.openxmlformats.org/drawingml/2006/main">
+        <a:graphic>
           <a:graphicData uri="http://schemas.openxmlformats.org/drawingml/2006/chart">
-            <c:chart xmlns:c="http://schemas.openxmlformats.org/drawingml/2006/chart" r:id="rId1"/>
+            <c:chart xmlns:c="http://schemas.openxmlformats.org/drawingml/2006/chart" xmlns:r="http://schemas.openxmlformats.org/officeDocument/2006/relationships" r:id="rId3"/>
           </a:graphicData>
         </a:graphic>
       </p:graphicFrame>
@@ -3872,7 +3734,7 @@
           <a:bodyPr wrap="square" rtlCol="0" anchor="t"/>
           <a:lstStyle/>
           <a:p>
-            <a:pPr indent="0" marL="0">
+            <a:pPr marL="0" indent="0">
               <a:spcAft>
                 <a:spcPts val="800"/>
               </a:spcAft>
@@ -3890,7 +3752,7 @@
             <a:endParaRPr lang="en-US" sz="1400" dirty="0"/>
           </a:p>
           <a:p>
-            <a:pPr indent="0" marL="0">
+            <a:pPr marL="0" indent="0">
               <a:spcAft>
                 <a:spcPts val="800"/>
               </a:spcAft>
@@ -3908,7 +3770,7 @@
             <a:endParaRPr lang="en-US" sz="1400" dirty="0"/>
           </a:p>
           <a:p>
-            <a:pPr indent="0" marL="0">
+            <a:pPr marL="0" indent="0">
               <a:spcAft>
                 <a:spcPts val="800"/>
               </a:spcAft>
@@ -3920,13 +3782,13 @@
                   <a:srgbClr val="000000"/>
                 </a:solidFill>
               </a:rPr>
-              <a:t>• 31,264 rows (11.1%) matched with medium confidence — auto-accepted, but exported to review_queue.csv for optional spot-checking.
+              <a:t>• 31,264 rows (11.1%) matched with medium confidence, auto-accepted, but exported to review_queue.csv for optional spot-checking.
 </a:t>
             </a:r>
             <a:endParaRPr lang="en-US" sz="1400" dirty="0"/>
           </a:p>
           <a:p>
-            <a:pPr indent="0" marL="0">
+            <a:pPr marL="0" indent="0">
               <a:spcAft>
                 <a:spcPts val="800"/>
               </a:spcAft>
@@ -3944,7 +3806,7 @@
             <a:endParaRPr lang="en-US" sz="1400" dirty="0"/>
           </a:p>
           <a:p>
-            <a:pPr indent="0" marL="0">
+            <a:pPr marL="0" indent="0">
               <a:spcAft>
                 <a:spcPts val="800"/>
               </a:spcAft>
@@ -3962,7 +3824,7 @@
             <a:endParaRPr lang="en-US" sz="1400" dirty="0"/>
           </a:p>
           <a:p>
-            <a:pPr indent="0" marL="0">
+            <a:pPr marL="0" indent="0">
               <a:spcAft>
                 <a:spcPts val="800"/>
               </a:spcAft>
@@ -3974,7 +3836,7 @@
                   <a:srgbClr val="000000"/>
                 </a:solidFill>
               </a:rPr>
-              <a:t>• 5,152 new-brand candidates look like product titles, not brands — flagged, not silently trusted.</a:t>
+              <a:t>• 5,152 new-brand candidates look like product titles, not brands, flagged, not silently trusted.</a:t>
             </a:r>
             <a:endParaRPr lang="en-US" sz="1400" dirty="0"/>
           </a:p>
@@ -3996,6 +3858,7 @@
         <a:solidFill>
           <a:srgbClr val="F4EFE6"/>
         </a:solidFill>
+        <a:effectLst/>
       </p:bgPr>
     </p:bg>
     <p:spTree>
@@ -4033,11 +3896,11 @@
           <a:bodyPr wrap="square" rtlCol="0" anchor="ctr"/>
           <a:lstStyle/>
           <a:p>
-            <a:pPr indent="0" marL="0">
-              <a:buNone/>
-            </a:pPr>
-            <a:r>
-              <a:rPr lang="en-US" sz="1300" b="1" spc="200" kern="0" dirty="0">
+            <a:pPr marL="0" indent="0">
+              <a:buNone/>
+            </a:pPr>
+            <a:r>
+              <a:rPr lang="en-US" sz="1300" b="1" kern="0" spc="200" dirty="0">
                 <a:solidFill>
                   <a:srgbClr val="C9A24B"/>
                 </a:solidFill>
@@ -4069,7 +3932,7 @@
           <a:bodyPr wrap="square" rtlCol="0" anchor="ctr"/>
           <a:lstStyle/>
           <a:p>
-            <a:pPr indent="0" marL="0">
+            <a:pPr marL="0" indent="0">
               <a:buNone/>
             </a:pPr>
             <a:r>
@@ -4119,23 +3982,41 @@
           <p:nvPr>
             <p:extLst>
               <p:ext uri="{D42A27DB-BD31-4B8C-83A1-F6EECF244321}">
-                <p14:modId xmlns:p14="http://schemas.microsoft.com/office/powerpoint/2010/main" val="1579011935"/>
+                <p14:modId xmlns:p14="http://schemas.microsoft.com/office/powerpoint/2010/main" val="2369419177"/>
               </p:ext>
             </p:extLst>
           </p:nvPr>
         </p:nvGraphicFramePr>
         <p:xfrm>
           <a:off x="640080" y="1920240"/>
-          <a:ext cx="10881360" cy="914400"/>
+          <a:ext cx="10881360" cy="2834640"/>
         </p:xfrm>
         <a:graphic>
           <a:graphicData uri="http://schemas.openxmlformats.org/drawingml/2006/table">
             <a:tbl>
               <a:tblPr/>
               <a:tblGrid>
-                <a:gridCol w="3291840"/>
-                <a:gridCol w="2377440"/>
-                <a:gridCol w="5212080"/>
+                <a:gridCol w="3291840">
+                  <a:extLst>
+                    <a:ext uri="{9D8B030D-6E8A-4147-A177-3AD203B41FA5}">
+                      <a16:colId xmlns:a16="http://schemas.microsoft.com/office/drawing/2014/main" val="20000"/>
+                    </a:ext>
+                  </a:extLst>
+                </a:gridCol>
+                <a:gridCol w="2377440">
+                  <a:extLst>
+                    <a:ext uri="{9D8B030D-6E8A-4147-A177-3AD203B41FA5}">
+                      <a16:colId xmlns:a16="http://schemas.microsoft.com/office/drawing/2014/main" val="20001"/>
+                    </a:ext>
+                  </a:extLst>
+                </a:gridCol>
+                <a:gridCol w="5212080">
+                  <a:extLst>
+                    <a:ext uri="{9D8B030D-6E8A-4147-A177-3AD203B41FA5}">
+                      <a16:colId xmlns:a16="http://schemas.microsoft.com/office/drawing/2014/main" val="20002"/>
+                    </a:ext>
+                  </a:extLst>
+                </a:gridCol>
               </a:tblGrid>
               <a:tr h="566928">
                 <a:tc>
@@ -4143,7 +4024,7 @@
                     <a:bodyPr/>
                     <a:lstStyle/>
                     <a:p>
-                      <a:pPr indent="0" marL="0">
+                      <a:pPr marL="0" indent="0">
                         <a:buNone/>
                       </a:pPr>
                       <a:r>
@@ -4157,7 +4038,7 @@
                       <a:endParaRPr lang="en-US" sz="1200" dirty="0"/>
                     </a:p>
                   </a:txBody>
-                  <a:tcPr marL="91440" marR="91440" marT="45720" marB="45720">
+                  <a:tcPr>
                     <a:lnL w="6350" cap="flat" cmpd="sng" algn="ctr">
                       <a:solidFill>
                         <a:srgbClr val="E4DCC9"/>
@@ -4204,7 +4085,7 @@
                     <a:bodyPr/>
                     <a:lstStyle/>
                     <a:p>
-                      <a:pPr indent="0" marL="0">
+                      <a:pPr marL="0" indent="0">
                         <a:buNone/>
                       </a:pPr>
                       <a:r>
@@ -4218,7 +4099,7 @@
                       <a:endParaRPr lang="en-US" sz="1200" dirty="0"/>
                     </a:p>
                   </a:txBody>
-                  <a:tcPr marL="91440" marR="91440" marT="45720" marB="45720">
+                  <a:tcPr>
                     <a:lnL w="6350" cap="flat" cmpd="sng" algn="ctr">
                       <a:solidFill>
                         <a:srgbClr val="E4DCC9"/>
@@ -4265,7 +4146,7 @@
                     <a:bodyPr/>
                     <a:lstStyle/>
                     <a:p>
-                      <a:pPr indent="0" marL="0">
+                      <a:pPr marL="0" indent="0">
                         <a:buNone/>
                       </a:pPr>
                       <a:r>
@@ -4279,7 +4160,7 @@
                       <a:endParaRPr lang="en-US" sz="1200" dirty="0"/>
                     </a:p>
                   </a:txBody>
-                  <a:tcPr marL="91440" marR="91440" marT="45720" marB="45720">
+                  <a:tcPr>
                     <a:lnL w="6350" cap="flat" cmpd="sng" algn="ctr">
                       <a:solidFill>
                         <a:srgbClr val="E4DCC9"/>
@@ -4321,6 +4202,11 @@
                     </a:solidFill>
                   </a:tcPr>
                 </a:tc>
+                <a:extLst>
+                  <a:ext uri="{0D108BD9-81ED-4DB2-BD59-A6C34878D82A}">
+                    <a16:rowId xmlns:a16="http://schemas.microsoft.com/office/drawing/2014/main" val="10000"/>
+                  </a:ext>
+                </a:extLst>
               </a:tr>
               <a:tr h="566928">
                 <a:tc>
@@ -4328,7 +4214,7 @@
                     <a:bodyPr/>
                     <a:lstStyle/>
                     <a:p>
-                      <a:pPr indent="0" marL="0">
+                      <a:pPr marL="0" indent="0">
                         <a:buNone/>
                       </a:pPr>
                       <a:r>
@@ -4342,7 +4228,7 @@
                       <a:endParaRPr lang="en-US" sz="1200" dirty="0"/>
                     </a:p>
                   </a:txBody>
-                  <a:tcPr marL="91440" marR="91440" marT="45720" marB="45720">
+                  <a:tcPr>
                     <a:lnL w="6350" cap="flat" cmpd="sng" algn="ctr">
                       <a:solidFill>
                         <a:srgbClr val="E4DCC9"/>
@@ -4389,7 +4275,7 @@
                     <a:bodyPr/>
                     <a:lstStyle/>
                     <a:p>
-                      <a:pPr indent="0" marL="0">
+                      <a:pPr marL="0" indent="0">
                         <a:buNone/>
                       </a:pPr>
                       <a:r>
@@ -4403,7 +4289,7 @@
                       <a:endParaRPr lang="en-US" sz="1200" dirty="0"/>
                     </a:p>
                   </a:txBody>
-                  <a:tcPr marL="91440" marR="91440" marT="45720" marB="45720">
+                  <a:tcPr>
                     <a:lnL w="6350" cap="flat" cmpd="sng" algn="ctr">
                       <a:solidFill>
                         <a:srgbClr val="E4DCC9"/>
@@ -4450,7 +4336,7 @@
                     <a:bodyPr/>
                     <a:lstStyle/>
                     <a:p>
-                      <a:pPr indent="0" marL="0">
+                      <a:pPr marL="0" indent="0">
                         <a:buNone/>
                       </a:pPr>
                       <a:r>
@@ -4459,12 +4345,12 @@
                             <a:srgbClr val="1B1F2A"/>
                           </a:solidFill>
                         </a:rPr>
-                        <a:t>High confidence — accepted as an existing Voysen brand</a:t>
+                        <a:t>High confidence, accepted as an existing Voysen brand</a:t>
                       </a:r>
                       <a:endParaRPr lang="en-US" sz="1200" dirty="0"/>
                     </a:p>
                   </a:txBody>
-                  <a:tcPr marL="91440" marR="91440" marT="45720" marB="45720">
+                  <a:tcPr>
                     <a:lnL w="6350" cap="flat" cmpd="sng" algn="ctr">
                       <a:solidFill>
                         <a:srgbClr val="E4DCC9"/>
@@ -4506,6 +4392,11 @@
                     </a:solidFill>
                   </a:tcPr>
                 </a:tc>
+                <a:extLst>
+                  <a:ext uri="{0D108BD9-81ED-4DB2-BD59-A6C34878D82A}">
+                    <a16:rowId xmlns:a16="http://schemas.microsoft.com/office/drawing/2014/main" val="10001"/>
+                  </a:ext>
+                </a:extLst>
               </a:tr>
               <a:tr h="566928">
                 <a:tc>
@@ -4513,7 +4404,7 @@
                     <a:bodyPr/>
                     <a:lstStyle/>
                     <a:p>
-                      <a:pPr indent="0" marL="0">
+                      <a:pPr marL="0" indent="0">
                         <a:buNone/>
                       </a:pPr>
                       <a:r>
@@ -4527,7 +4418,7 @@
                       <a:endParaRPr lang="en-US" sz="1200" dirty="0"/>
                     </a:p>
                   </a:txBody>
-                  <a:tcPr marL="91440" marR="91440" marT="45720" marB="45720">
+                  <a:tcPr>
                     <a:lnL w="6350" cap="flat" cmpd="sng" algn="ctr">
                       <a:solidFill>
                         <a:srgbClr val="E4DCC9"/>
@@ -4574,7 +4465,7 @@
                     <a:bodyPr/>
                     <a:lstStyle/>
                     <a:p>
-                      <a:pPr indent="0" marL="0">
+                      <a:pPr marL="0" indent="0">
                         <a:buNone/>
                       </a:pPr>
                       <a:r>
@@ -4588,7 +4479,7 @@
                       <a:endParaRPr lang="en-US" sz="1200" dirty="0"/>
                     </a:p>
                   </a:txBody>
-                  <a:tcPr marL="91440" marR="91440" marT="45720" marB="45720">
+                  <a:tcPr>
                     <a:lnL w="6350" cap="flat" cmpd="sng" algn="ctr">
                       <a:solidFill>
                         <a:srgbClr val="E4DCC9"/>
@@ -4635,7 +4526,7 @@
                     <a:bodyPr/>
                     <a:lstStyle/>
                     <a:p>
-                      <a:pPr indent="0" marL="0">
+                      <a:pPr marL="0" indent="0">
                         <a:buNone/>
                       </a:pPr>
                       <a:r>
@@ -4649,7 +4540,7 @@
                       <a:endParaRPr lang="en-US" sz="1200" dirty="0"/>
                     </a:p>
                   </a:txBody>
-                  <a:tcPr marL="91440" marR="91440" marT="45720" marB="45720">
+                  <a:tcPr>
                     <a:lnL w="6350" cap="flat" cmpd="sng" algn="ctr">
                       <a:solidFill>
                         <a:srgbClr val="E4DCC9"/>
@@ -4691,6 +4582,11 @@
                     </a:solidFill>
                   </a:tcPr>
                 </a:tc>
+                <a:extLst>
+                  <a:ext uri="{0D108BD9-81ED-4DB2-BD59-A6C34878D82A}">
+                    <a16:rowId xmlns:a16="http://schemas.microsoft.com/office/drawing/2014/main" val="10002"/>
+                  </a:ext>
+                </a:extLst>
               </a:tr>
               <a:tr h="566928">
                 <a:tc>
@@ -4698,7 +4594,7 @@
                     <a:bodyPr/>
                     <a:lstStyle/>
                     <a:p>
-                      <a:pPr indent="0" marL="0">
+                      <a:pPr marL="0" indent="0">
                         <a:buNone/>
                       </a:pPr>
                       <a:r>
@@ -4712,7 +4608,7 @@
                       <a:endParaRPr lang="en-US" sz="1200" dirty="0"/>
                     </a:p>
                   </a:txBody>
-                  <a:tcPr marL="91440" marR="91440" marT="45720" marB="45720">
+                  <a:tcPr>
                     <a:lnL w="6350" cap="flat" cmpd="sng" algn="ctr">
                       <a:solidFill>
                         <a:srgbClr val="E4DCC9"/>
@@ -4759,7 +4655,7 @@
                     <a:bodyPr/>
                     <a:lstStyle/>
                     <a:p>
-                      <a:pPr indent="0" marL="0">
+                      <a:pPr marL="0" indent="0">
                         <a:buNone/>
                       </a:pPr>
                       <a:r>
@@ -4773,7 +4669,7 @@
                       <a:endParaRPr lang="en-US" sz="1200" dirty="0"/>
                     </a:p>
                   </a:txBody>
-                  <a:tcPr marL="91440" marR="91440" marT="45720" marB="45720">
+                  <a:tcPr>
                     <a:lnL w="6350" cap="flat" cmpd="sng" algn="ctr">
                       <a:solidFill>
                         <a:srgbClr val="E4DCC9"/>
@@ -4820,7 +4716,7 @@
                     <a:bodyPr/>
                     <a:lstStyle/>
                     <a:p>
-                      <a:pPr indent="0" marL="0">
+                      <a:pPr marL="0" indent="0">
                         <a:buNone/>
                       </a:pPr>
                       <a:r>
@@ -4829,12 +4725,12 @@
                             <a:srgbClr val="1B1F2A"/>
                           </a:solidFill>
                         </a:rPr>
-                        <a:t>No credible existing match — becomes a new Voysen brand</a:t>
+                        <a:t>No credible existing match, becomes a new Voysen brand</a:t>
                       </a:r>
                       <a:endParaRPr lang="en-US" sz="1200" dirty="0"/>
                     </a:p>
                   </a:txBody>
-                  <a:tcPr marL="91440" marR="91440" marT="45720" marB="45720">
+                  <a:tcPr>
                     <a:lnL w="6350" cap="flat" cmpd="sng" algn="ctr">
                       <a:solidFill>
                         <a:srgbClr val="E4DCC9"/>
@@ -4876,6 +4772,11 @@
                     </a:solidFill>
                   </a:tcPr>
                 </a:tc>
+                <a:extLst>
+                  <a:ext uri="{0D108BD9-81ED-4DB2-BD59-A6C34878D82A}">
+                    <a16:rowId xmlns:a16="http://schemas.microsoft.com/office/drawing/2014/main" val="10003"/>
+                  </a:ext>
+                </a:extLst>
               </a:tr>
               <a:tr h="566928">
                 <a:tc>
@@ -4883,7 +4784,7 @@
                     <a:bodyPr/>
                     <a:lstStyle/>
                     <a:p>
-                      <a:pPr indent="0" marL="0">
+                      <a:pPr marL="0" indent="0">
                         <a:buNone/>
                       </a:pPr>
                       <a:r>
@@ -4897,7 +4798,7 @@
                       <a:endParaRPr lang="en-US" sz="1200" dirty="0"/>
                     </a:p>
                   </a:txBody>
-                  <a:tcPr marL="91440" marR="91440" marT="45720" marB="45720">
+                  <a:tcPr>
                     <a:lnL w="6350" cap="flat" cmpd="sng" algn="ctr">
                       <a:solidFill>
                         <a:srgbClr val="E4DCC9"/>
@@ -4944,7 +4845,7 @@
                     <a:bodyPr/>
                     <a:lstStyle/>
                     <a:p>
-                      <a:pPr indent="0" marL="0">
+                      <a:pPr marL="0" indent="0">
                         <a:buNone/>
                       </a:pPr>
                       <a:r>
@@ -4958,7 +4859,7 @@
                       <a:endParaRPr lang="en-US" sz="1200" dirty="0"/>
                     </a:p>
                   </a:txBody>
-                  <a:tcPr marL="91440" marR="91440" marT="45720" marB="45720">
+                  <a:tcPr>
                     <a:lnL w="6350" cap="flat" cmpd="sng" algn="ctr">
                       <a:solidFill>
                         <a:srgbClr val="E4DCC9"/>
@@ -5005,7 +4906,7 @@
                     <a:bodyPr/>
                     <a:lstStyle/>
                     <a:p>
-                      <a:pPr indent="0" marL="0">
+                      <a:pPr marL="0" indent="0">
                         <a:buNone/>
                       </a:pPr>
                       <a:r>
@@ -5014,12 +4915,12 @@
                             <a:srgbClr val="1B1F2A"/>
                           </a:solidFill>
                         </a:rPr>
-                        <a:t>Looks like a product title — reviewed separately, not silently trusted</a:t>
+                        <a:t>Looks like a product title, reviewed separately, not silently trusted</a:t>
                       </a:r>
                       <a:endParaRPr lang="en-US" sz="1200" dirty="0"/>
                     </a:p>
                   </a:txBody>
-                  <a:tcPr marL="91440" marR="91440" marT="45720" marB="45720">
+                  <a:tcPr>
                     <a:lnL w="6350" cap="flat" cmpd="sng" algn="ctr">
                       <a:solidFill>
                         <a:srgbClr val="E4DCC9"/>
@@ -5061,6 +4962,11 @@
                     </a:solidFill>
                   </a:tcPr>
                 </a:tc>
+                <a:extLst>
+                  <a:ext uri="{0D108BD9-81ED-4DB2-BD59-A6C34878D82A}">
+                    <a16:rowId xmlns:a16="http://schemas.microsoft.com/office/drawing/2014/main" val="10004"/>
+                  </a:ext>
+                </a:extLst>
               </a:tr>
             </a:tbl>
           </a:graphicData>
@@ -5087,7 +4993,7 @@
           <a:bodyPr wrap="square" rtlCol="0" anchor="ctr"/>
           <a:lstStyle/>
           <a:p>
-            <a:pPr indent="0" marL="0">
+            <a:pPr marL="0" indent="0">
               <a:buNone/>
             </a:pPr>
             <a:r>
@@ -5096,7 +5002,7 @@
                   <a:srgbClr val="5B6472"/>
                 </a:solidFill>
               </a:rPr>
-              <a:t>All thresholds live as named constants at the top of match_brands.py — easy to re-tune after a larger labeled sample, no code archaeology required.</a:t>
+              <a:t>All thresholds live as named constants at the top of match_brands.py, easy to re-tune after a larger labeled sample, no code archaeology required.</a:t>
             </a:r>
             <a:endParaRPr lang="en-US" sz="1200" dirty="0"/>
           </a:p>
@@ -5118,6 +5024,7 @@
         <a:solidFill>
           <a:srgbClr val="F4EFE6"/>
         </a:solidFill>
+        <a:effectLst/>
       </p:bgPr>
     </p:bg>
     <p:spTree>
@@ -5155,11 +5062,11 @@
           <a:bodyPr wrap="square" rtlCol="0" anchor="ctr"/>
           <a:lstStyle/>
           <a:p>
-            <a:pPr indent="0" marL="0">
-              <a:buNone/>
-            </a:pPr>
-            <a:r>
-              <a:rPr lang="en-US" sz="1300" b="1" spc="200" kern="0" dirty="0">
+            <a:pPr marL="0" indent="0">
+              <a:buNone/>
+            </a:pPr>
+            <a:r>
+              <a:rPr lang="en-US" sz="1300" b="1" kern="0" spc="200" dirty="0">
                 <a:solidFill>
                   <a:srgbClr val="C9A24B"/>
                 </a:solidFill>
@@ -5191,7 +5098,7 @@
           <a:bodyPr wrap="square" rtlCol="0" anchor="ctr"/>
           <a:lstStyle/>
           <a:p>
-            <a:pPr indent="0" marL="0">
+            <a:pPr marL="0" indent="0">
               <a:buNone/>
             </a:pPr>
             <a:r>
@@ -5253,7 +5160,7 @@
           <a:bodyPr wrap="square" rtlCol="0" anchor="ctr"/>
           <a:lstStyle/>
           <a:p>
-            <a:pPr indent="0" marL="0">
+            <a:pPr marL="0" indent="0">
               <a:buNone/>
             </a:pPr>
             <a:r>
@@ -5302,7 +5209,23 @@
                   <a:srgbClr val="1B1F2A"/>
                 </a:solidFill>
               </a:rPr>
-              <a:t>No compiled fuzzy-matching library available offline (rapidfuzz) — char n-gram TF-IDF is a solid, fast substitute, but exact edit-distance would sharpen borderline cases.</a:t>
+              <a:t>No compiled fuzzy-matching library available offline (</a:t>
+            </a:r>
+            <a:r>
+              <a:rPr lang="en-US" sz="1200" dirty="0" err="1">
+                <a:solidFill>
+                  <a:srgbClr val="1B1F2A"/>
+                </a:solidFill>
+              </a:rPr>
+              <a:t>rapidfuzz</a:t>
+            </a:r>
+            <a:r>
+              <a:rPr lang="en-US" sz="1200" dirty="0">
+                <a:solidFill>
+                  <a:srgbClr val="1B1F2A"/>
+                </a:solidFill>
+              </a:rPr>
+              <a:t>), char n-gram TF-IDF is a solid, fast substitute, but exact edit-distance would sharpen borderline cases.</a:t>
             </a:r>
             <a:endParaRPr lang="en-US" sz="1200" dirty="0"/>
           </a:p>
@@ -5320,7 +5243,7 @@
                   <a:srgbClr val="1B1F2A"/>
                 </a:solidFill>
               </a:rPr>
-              <a:t>Near-duplicate new-brand clustering only runs below 40k unique names in this environment (memory-bound) — above that, one new brand per unique spelling.</a:t>
+              <a:t>Near-duplicate new-brand clustering only runs below 40k unique names in this environment (memory-bound), above that, one new brand per unique spelling.</a:t>
             </a:r>
             <a:endParaRPr lang="en-US" sz="1200" dirty="0"/>
           </a:p>
@@ -5365,7 +5288,7 @@
           <a:bodyPr wrap="square" rtlCol="0" anchor="ctr"/>
           <a:lstStyle/>
           <a:p>
-            <a:pPr indent="0" marL="0">
+            <a:pPr marL="0" indent="0">
               <a:buNone/>
             </a:pPr>
             <a:r>
@@ -5490,6 +5413,7 @@
         <a:solidFill>
           <a:srgbClr val="13203A"/>
         </a:solidFill>
+        <a:effectLst/>
       </p:bgPr>
     </p:bg>
     <p:spTree>
@@ -5527,7 +5451,7 @@
           <a:bodyPr wrap="square" rtlCol="0" anchor="ctr"/>
           <a:lstStyle/>
           <a:p>
-            <a:pPr indent="0" marL="0">
+            <a:pPr marL="0" indent="0">
               <a:buNone/>
             </a:pPr>
             <a:r>
@@ -5579,7 +5503,7 @@
                   <a:srgbClr val="E7E9EF"/>
                 </a:solidFill>
               </a:rPr>
-              <a:t>match_brands.py + normalize.py — the executable, documented pipeline (Python, pandas, scikit-learn)</a:t>
+              <a:t>match_brands.py + normalize.py: the executable, documented pipeline (Python, pandas, scikit-learn)</a:t>
             </a:r>
             <a:endParaRPr lang="en-US" sz="1350" dirty="0"/>
           </a:p>
@@ -5597,7 +5521,7 @@
                   <a:srgbClr val="E7E9EF"/>
                 </a:solidFill>
               </a:rPr>
-              <a:t>brand_associations.csv — one association per retailer row: (id_brand_voysen, brand_voysen, url_source, source)</a:t>
+              <a:t>brand_associations.csv: one association per retailer row: (id_brand_voysen, brand_voysen, url_source, source)</a:t>
             </a:r>
             <a:endParaRPr lang="en-US" sz="1350" dirty="0"/>
           </a:p>
@@ -5615,7 +5539,7 @@
                   <a:srgbClr val="E7E9EF"/>
                 </a:solidFill>
               </a:rPr>
-              <a:t>voysen_brands_augmented.csv — original 12,153 brands + 185,478 newly created brands</a:t>
+              <a:t>voysen_brands_augmented.csv: original 12,153 brands + 185,478 newly created brands</a:t>
             </a:r>
             <a:endParaRPr lang="en-US" sz="1350" dirty="0"/>
           </a:p>
@@ -5633,7 +5557,7 @@
                   <a:srgbClr val="E7E9EF"/>
                 </a:solidFill>
               </a:rPr>
-              <a:t>review_queue.csv / non_brand_review_queue.csv — optional QA aids, not required to run</a:t>
+              <a:t>review_queue.csv / non_brand_review_queue.csv: optional QA aids, not required to run</a:t>
             </a:r>
             <a:endParaRPr lang="en-US" sz="1350" dirty="0"/>
           </a:p>
@@ -5646,12 +5570,20 @@
               <a:buChar char="•"/>
             </a:pPr>
             <a:r>
+              <a:rPr lang="en-US" sz="1350" dirty="0" err="1">
+                <a:solidFill>
+                  <a:srgbClr val="E7E9EF"/>
+                </a:solidFill>
+              </a:rPr>
+              <a:t>match_report.json</a:t>
+            </a:r>
+            <a:r>
               <a:rPr lang="en-US" sz="1350" dirty="0">
                 <a:solidFill>
                   <a:srgbClr val="E7E9EF"/>
                 </a:solidFill>
               </a:rPr>
-              <a:t>match_report.json — run metrics, thresholds, full auditability</a:t>
+              <a:t>: run metrics, thresholds, full auditability</a:t>
             </a:r>
             <a:endParaRPr lang="en-US" sz="1350" dirty="0"/>
           </a:p>
@@ -5701,7 +5633,7 @@
           <a:bodyPr wrap="square" rtlCol="0" anchor="ctr"/>
           <a:lstStyle/>
           <a:p>
-            <a:pPr indent="0" marL="0">
+            <a:pPr marL="0" indent="0">
               <a:buNone/>
             </a:pPr>
             <a:r>
@@ -5710,7 +5642,7 @@
                   <a:srgbClr val="C9A24B"/>
                 </a:solidFill>
               </a:rPr>
-              <a:t>Thank you — happy to walk through the code and trade-offs live.</a:t>
+              <a:t>Thank you, happy to walk through the code and trade-offs live.</a:t>
             </a:r>
             <a:endParaRPr lang="en-US" sz="1400" dirty="0"/>
           </a:p>
@@ -6017,4 +5949,299 @@
     </a:ext>
   </a:extLst>
 </a:theme>
+</file>
+
+<file path=ppt/theme/theme2.xml><?xml version="1.0" encoding="utf-8"?>
+<a:theme xmlns:a="http://schemas.openxmlformats.org/drawingml/2006/main" name="Thème Office">
+  <a:themeElements>
+    <a:clrScheme name="Office">
+      <a:dk1>
+        <a:sysClr val="windowText" lastClr="000000"/>
+      </a:dk1>
+      <a:lt1>
+        <a:sysClr val="window" lastClr="FFFFFF"/>
+      </a:lt1>
+      <a:dk2>
+        <a:srgbClr val="44546A"/>
+      </a:dk2>
+      <a:lt2>
+        <a:srgbClr val="E7E6E6"/>
+      </a:lt2>
+      <a:accent1>
+        <a:srgbClr val="4472C4"/>
+      </a:accent1>
+      <a:accent2>
+        <a:srgbClr val="ED7D31"/>
+      </a:accent2>
+      <a:accent3>
+        <a:srgbClr val="A5A5A5"/>
+      </a:accent3>
+      <a:accent4>
+        <a:srgbClr val="FFC000"/>
+      </a:accent4>
+      <a:accent5>
+        <a:srgbClr val="5B9BD5"/>
+      </a:accent5>
+      <a:accent6>
+        <a:srgbClr val="70AD47"/>
+      </a:accent6>
+      <a:hlink>
+        <a:srgbClr val="0563C1"/>
+      </a:hlink>
+      <a:folHlink>
+        <a:srgbClr val="954F72"/>
+      </a:folHlink>
+    </a:clrScheme>
+    <a:fontScheme name="Office">
+      <a:majorFont>
+        <a:latin typeface="Calibri Light" panose="020F0302020204030204"/>
+        <a:ea typeface=""/>
+        <a:cs typeface=""/>
+        <a:font script="Jpan" typeface="游ゴシック Light"/>
+        <a:font script="Hang" typeface="맑은 고딕"/>
+        <a:font script="Hans" typeface="等线 Light"/>
+        <a:font script="Hant" typeface="新細明體"/>
+        <a:font script="Arab" typeface="Times New Roman"/>
+        <a:font script="Hebr" typeface="Times New Roman"/>
+        <a:font script="Thai" typeface="Angsana New"/>
+        <a:font script="Ethi" typeface="Nyala"/>
+        <a:font script="Beng" typeface="Vrinda"/>
+        <a:font script="Gujr" typeface="Shruti"/>
+        <a:font script="Khmr" typeface="MoolBoran"/>
+        <a:font script="Knda" typeface="Tunga"/>
+        <a:font script="Guru" typeface="Raavi"/>
+        <a:font script="Cans" typeface="Euphemia"/>
+        <a:font script="Cher" typeface="Plantagenet Cherokee"/>
+        <a:font script="Yiii" typeface="Microsoft Yi Baiti"/>
+        <a:font script="Tibt" typeface="Microsoft Himalaya"/>
+        <a:font script="Thaa" typeface="MV Boli"/>
+        <a:font script="Deva" typeface="Mangal"/>
+        <a:font script="Telu" typeface="Gautami"/>
+        <a:font script="Taml" typeface="Latha"/>
+        <a:font script="Syrc" typeface="Estrangelo Edessa"/>
+        <a:font script="Orya" typeface="Kalinga"/>
+        <a:font script="Mlym" typeface="Kartika"/>
+        <a:font script="Laoo" typeface="DokChampa"/>
+        <a:font script="Sinh" typeface="Iskoola Pota"/>
+        <a:font script="Mong" typeface="Mongolian Baiti"/>
+        <a:font script="Viet" typeface="Times New Roman"/>
+        <a:font script="Uigh" typeface="Microsoft Uighur"/>
+        <a:font script="Geor" typeface="Sylfaen"/>
+        <a:font script="Armn" typeface="Arial"/>
+        <a:font script="Bugi" typeface="Leelawadee UI"/>
+        <a:font script="Bopo" typeface="Microsoft JhengHei"/>
+        <a:font script="Java" typeface="Javanese Text"/>
+        <a:font script="Lisu" typeface="Segoe UI"/>
+        <a:font script="Mymr" typeface="Myanmar Text"/>
+        <a:font script="Nkoo" typeface="Ebrima"/>
+        <a:font script="Olck" typeface="Nirmala UI"/>
+        <a:font script="Osma" typeface="Ebrima"/>
+        <a:font script="Phag" typeface="Phagspa"/>
+        <a:font script="Syrn" typeface="Estrangelo Edessa"/>
+        <a:font script="Syrj" typeface="Estrangelo Edessa"/>
+        <a:font script="Syre" typeface="Estrangelo Edessa"/>
+        <a:font script="Sora" typeface="Nirmala UI"/>
+        <a:font script="Tale" typeface="Microsoft Tai Le"/>
+        <a:font script="Talu" typeface="Microsoft New Tai Lue"/>
+        <a:font script="Tfng" typeface="Ebrima"/>
+      </a:majorFont>
+      <a:minorFont>
+        <a:latin typeface="Calibri" panose="020F0502020204030204"/>
+        <a:ea typeface=""/>
+        <a:cs typeface=""/>
+        <a:font script="Jpan" typeface="游ゴシック"/>
+        <a:font script="Hang" typeface="맑은 고딕"/>
+        <a:font script="Hans" typeface="等线"/>
+        <a:font script="Hant" typeface="新細明體"/>
+        <a:font script="Arab" typeface="Arial"/>
+        <a:font script="Hebr" typeface="Arial"/>
+        <a:font script="Thai" typeface="Cordia New"/>
+        <a:font script="Ethi" typeface="Nyala"/>
+        <a:font script="Beng" typeface="Vrinda"/>
+        <a:font script="Gujr" typeface="Shruti"/>
+        <a:font script="Khmr" typeface="DaunPenh"/>
+        <a:font script="Knda" typeface="Tunga"/>
+        <a:font script="Guru" typeface="Raavi"/>
+        <a:font script="Cans" typeface="Euphemia"/>
+        <a:font script="Cher" typeface="Plantagenet Cherokee"/>
+        <a:font script="Yiii" typeface="Microsoft Yi Baiti"/>
+        <a:font script="Tibt" typeface="Microsoft Himalaya"/>
+        <a:font script="Thaa" typeface="MV Boli"/>
+        <a:font script="Deva" typeface="Mangal"/>
+        <a:font script="Telu" typeface="Gautami"/>
+        <a:font script="Taml" typeface="Latha"/>
+        <a:font script="Syrc" typeface="Estrangelo Edessa"/>
+        <a:font script="Orya" typeface="Kalinga"/>
+        <a:font script="Mlym" typeface="Kartika"/>
+        <a:font script="Laoo" typeface="DokChampa"/>
+        <a:font script="Sinh" typeface="Iskoola Pota"/>
+        <a:font script="Mong" typeface="Mongolian Baiti"/>
+        <a:font script="Viet" typeface="Arial"/>
+        <a:font script="Uigh" typeface="Microsoft Uighur"/>
+        <a:font script="Geor" typeface="Sylfaen"/>
+        <a:font script="Armn" typeface="Arial"/>
+        <a:font script="Bugi" typeface="Leelawadee UI"/>
+        <a:font script="Bopo" typeface="Microsoft JhengHei"/>
+        <a:font script="Java" typeface="Javanese Text"/>
+        <a:font script="Lisu" typeface="Segoe UI"/>
+        <a:font script="Mymr" typeface="Myanmar Text"/>
+        <a:font script="Nkoo" typeface="Ebrima"/>
+        <a:font script="Olck" typeface="Nirmala UI"/>
+        <a:font script="Osma" typeface="Ebrima"/>
+        <a:font script="Phag" typeface="Phagspa"/>
+        <a:font script="Syrn" typeface="Estrangelo Edessa"/>
+        <a:font script="Syrj" typeface="Estrangelo Edessa"/>
+        <a:font script="Syre" typeface="Estrangelo Edessa"/>
+        <a:font script="Sora" typeface="Nirmala UI"/>
+        <a:font script="Tale" typeface="Microsoft Tai Le"/>
+        <a:font script="Talu" typeface="Microsoft New Tai Lue"/>
+        <a:font script="Tfng" typeface="Ebrima"/>
+      </a:minorFont>
+    </a:fontScheme>
+    <a:fmtScheme name="Office">
+      <a:fillStyleLst>
+        <a:solidFill>
+          <a:schemeClr val="phClr"/>
+        </a:solidFill>
+        <a:gradFill rotWithShape="1">
+          <a:gsLst>
+            <a:gs pos="0">
+              <a:schemeClr val="phClr">
+                <a:lumMod val="110000"/>
+                <a:satMod val="105000"/>
+                <a:tint val="67000"/>
+              </a:schemeClr>
+            </a:gs>
+            <a:gs pos="50000">
+              <a:schemeClr val="phClr">
+                <a:lumMod val="105000"/>
+                <a:satMod val="103000"/>
+                <a:tint val="73000"/>
+              </a:schemeClr>
+            </a:gs>
+            <a:gs pos="100000">
+              <a:schemeClr val="phClr">
+                <a:lumMod val="105000"/>
+                <a:satMod val="109000"/>
+                <a:tint val="81000"/>
+              </a:schemeClr>
+            </a:gs>
+          </a:gsLst>
+          <a:lin ang="5400000" scaled="0"/>
+        </a:gradFill>
+        <a:gradFill rotWithShape="1">
+          <a:gsLst>
+            <a:gs pos="0">
+              <a:schemeClr val="phClr">
+                <a:satMod val="103000"/>
+                <a:lumMod val="102000"/>
+                <a:tint val="94000"/>
+              </a:schemeClr>
+            </a:gs>
+            <a:gs pos="50000">
+              <a:schemeClr val="phClr">
+                <a:satMod val="110000"/>
+                <a:lumMod val="100000"/>
+                <a:shade val="100000"/>
+              </a:schemeClr>
+            </a:gs>
+            <a:gs pos="100000">
+              <a:schemeClr val="phClr">
+                <a:lumMod val="99000"/>
+                <a:satMod val="120000"/>
+                <a:shade val="78000"/>
+              </a:schemeClr>
+            </a:gs>
+          </a:gsLst>
+          <a:lin ang="5400000" scaled="0"/>
+        </a:gradFill>
+      </a:fillStyleLst>
+      <a:lnStyleLst>
+        <a:ln w="6350" cap="flat" cmpd="sng" algn="ctr">
+          <a:solidFill>
+            <a:schemeClr val="phClr"/>
+          </a:solidFill>
+          <a:prstDash val="solid"/>
+          <a:miter lim="800000"/>
+        </a:ln>
+        <a:ln w="12700" cap="flat" cmpd="sng" algn="ctr">
+          <a:solidFill>
+            <a:schemeClr val="phClr"/>
+          </a:solidFill>
+          <a:prstDash val="solid"/>
+          <a:miter lim="800000"/>
+        </a:ln>
+        <a:ln w="19050" cap="flat" cmpd="sng" algn="ctr">
+          <a:solidFill>
+            <a:schemeClr val="phClr"/>
+          </a:solidFill>
+          <a:prstDash val="solid"/>
+          <a:miter lim="800000"/>
+        </a:ln>
+      </a:lnStyleLst>
+      <a:effectStyleLst>
+        <a:effectStyle>
+          <a:effectLst/>
+        </a:effectStyle>
+        <a:effectStyle>
+          <a:effectLst/>
+        </a:effectStyle>
+        <a:effectStyle>
+          <a:effectLst>
+            <a:outerShdw blurRad="57150" dist="19050" dir="5400000" algn="ctr" rotWithShape="0">
+              <a:srgbClr val="000000">
+                <a:alpha val="63000"/>
+              </a:srgbClr>
+            </a:outerShdw>
+          </a:effectLst>
+        </a:effectStyle>
+      </a:effectStyleLst>
+      <a:bgFillStyleLst>
+        <a:solidFill>
+          <a:schemeClr val="phClr"/>
+        </a:solidFill>
+        <a:solidFill>
+          <a:schemeClr val="phClr">
+            <a:tint val="95000"/>
+            <a:satMod val="170000"/>
+          </a:schemeClr>
+        </a:solidFill>
+        <a:gradFill rotWithShape="1">
+          <a:gsLst>
+            <a:gs pos="0">
+              <a:schemeClr val="phClr">
+                <a:tint val="93000"/>
+                <a:satMod val="150000"/>
+                <a:shade val="98000"/>
+                <a:lumMod val="102000"/>
+              </a:schemeClr>
+            </a:gs>
+            <a:gs pos="50000">
+              <a:schemeClr val="phClr">
+                <a:tint val="98000"/>
+                <a:satMod val="130000"/>
+                <a:shade val="90000"/>
+                <a:lumMod val="103000"/>
+              </a:schemeClr>
+            </a:gs>
+            <a:gs pos="100000">
+              <a:schemeClr val="phClr">
+                <a:shade val="63000"/>
+                <a:satMod val="120000"/>
+              </a:schemeClr>
+            </a:gs>
+          </a:gsLst>
+          <a:lin ang="5400000" scaled="0"/>
+        </a:gradFill>
+      </a:bgFillStyleLst>
+    </a:fmtScheme>
+  </a:themeElements>
+  <a:objectDefaults/>
+  <a:extraClrSchemeLst/>
+  <a:extLst>
+    <a:ext uri="{05A4C25C-085E-4340-85A3-A5531E510DB2}">
+      <thm15:themeFamily xmlns:thm15="http://schemas.microsoft.com/office/thememl/2012/main" name="Office Theme" id="{62F939B6-93AF-4DB8-9C6B-D6C7DFDC589F}" vid="{4A3C46E8-61CC-4603-A589-7422A47A8E4A}"/>
+    </a:ext>
+  </a:extLst>
+</a:theme>
 </file>